--- a/Lunes-08/S01_Lunes-08_1_Carrusel_Asi-es-Notaly_1x1.pptx
+++ b/Lunes-08/S01_Lunes-08_1_Carrusel_Asi-es-Notaly_1x1.pptx
@@ -3725,7 +3725,7 @@
         </p:nvSpPr>
         <p:spPr>
           <a:xfrm>
-            <a:off x="777240" y="1716786"/>
+            <a:off x="777240" y="1280160"/>
             <a:ext cx="1371600" cy="146304"/>
           </a:xfrm>
           <a:prstGeom prst="rect">
@@ -3769,8 +3769,8 @@
         </p:nvSpPr>
         <p:spPr>
           <a:xfrm>
-            <a:off x="777240" y="2173986"/>
-            <a:ext cx="6675120" cy="3150108"/>
+            <a:off x="777240" y="1737360"/>
+            <a:ext cx="6675120" cy="4499483"/>
           </a:xfrm>
           <a:prstGeom prst="rect">
             <a:avLst/>
@@ -3789,7 +3789,7 @@
               </a:lnSpc>
             </a:pPr>
             <a:r>
-              <a:rPr sz="4500" b="1">
+              <a:rPr sz="5300" b="1">
                 <a:solidFill>
                   <a:srgbClr val="FFFFFF"/>
                 </a:solidFill>
@@ -3808,8 +3808,8 @@
         </p:nvSpPr>
         <p:spPr>
           <a:xfrm>
-            <a:off x="777240" y="5324094"/>
-            <a:ext cx="6675120" cy="1530858"/>
+            <a:off x="777240" y="5877052"/>
+            <a:ext cx="6675120" cy="1118108"/>
           </a:xfrm>
           <a:prstGeom prst="rect">
             <a:avLst/>
@@ -3834,7 +3834,7 @@
                 </a:solidFill>
                 <a:latin typeface="Inter"/>
               </a:rPr>
-              <a:t>Notaly ya está abierto en early access.</a:t>
+              <a:t>Esto es Notaly.</a:t>
             </a:r>
           </a:p>
         </p:txBody>
@@ -4069,7 +4069,7 @@
                 </a:solidFill>
                 <a:latin typeface="Inter"/>
               </a:rPr>
-              <a:t>Pruébalo ya: notaly.com.ve</a:t>
+              <a:t>Conócenos en notaly.com.ve</a:t>
             </a:r>
           </a:p>
         </p:txBody>
